--- a/outsystems/niveau-1/deel-02/slidedeck.pptx
+++ b/outsystems/niveau-1/deel-02/slidedeck.pptx
@@ -3440,8 +3440,8 @@
         </p:nvSpPr>
         <p:spPr>
           <a:xfrm>
-            <a:off x="640080" y="548640"/>
-            <a:ext cx="10881360" cy="914400"/>
+            <a:off x="640080" y="457200"/>
+            <a:ext cx="10881360" cy="822960"/>
           </a:xfrm>
           <a:prstGeom prst="rect">
             <a:avLst/>
@@ -3633,8 +3633,8 @@
         </p:nvSpPr>
         <p:spPr>
           <a:xfrm>
-            <a:off x="640080" y="548640"/>
-            <a:ext cx="10881360" cy="914400"/>
+            <a:off x="640080" y="457200"/>
+            <a:ext cx="10881360" cy="822960"/>
           </a:xfrm>
           <a:prstGeom prst="rect">
             <a:avLst/>
@@ -3753,8 +3753,8 @@
         </p:nvSpPr>
         <p:spPr>
           <a:xfrm>
-            <a:off x="640080" y="457200"/>
-            <a:ext cx="10881360" cy="731520"/>
+            <a:off x="640080" y="365760"/>
+            <a:ext cx="10881360" cy="640080"/>
           </a:xfrm>
           <a:prstGeom prst="rect">
             <a:avLst/>
@@ -3769,7 +3769,7 @@
           <a:p>
             <a:pPr algn="l"/>
             <a:r>
-              <a:rPr sz="2600" b="1">
+              <a:rPr sz="2400" b="1">
                 <a:solidFill>
                   <a:srgbClr val="14213D"/>
                 </a:solidFill>
@@ -3789,8 +3789,8 @@
           <p:nvPr/>
         </p:nvGraphicFramePr>
         <p:xfrm>
-          <a:off x="640080" y="1371600"/>
-          <a:ext cx="10881360" cy="2743200"/>
+          <a:off x="640080" y="1097280"/>
+          <a:ext cx="10881360" cy="2286000"/>
         </p:xfrm>
         <a:graphic>
           <a:graphicData uri="http://schemas.openxmlformats.org/drawingml/2006/table">
@@ -3803,7 +3803,7 @@
                 <a:gridCol w="3627120"/>
                 <a:gridCol w="3627120"/>
               </a:tblGrid>
-              <a:tr h="548640">
+              <a:tr h="457200">
                 <a:tc>
                   <a:txBody>
                     <a:bodyPr/>
@@ -3818,7 +3818,7 @@
                     <a:lstStyle/>
                     <a:p>
                       <a:r>
-                        <a:rPr sz="1600" b="1"/>
+                        <a:rPr sz="1400" b="1"/>
                         <a:t>O11</a:t>
                       </a:r>
                     </a:p>
@@ -3831,7 +3831,7 @@
                     <a:lstStyle/>
                     <a:p>
                       <a:r>
-                        <a:rPr sz="1600" b="1"/>
+                        <a:rPr sz="1400" b="1"/>
                         <a:t>ODC</a:t>
                       </a:r>
                     </a:p>
@@ -3839,14 +3839,14 @@
                   <a:tcPr/>
                 </a:tc>
               </a:tr>
-              <a:tr h="548640">
+              <a:tr h="457200">
                 <a:tc>
                   <a:txBody>
                     <a:bodyPr/>
                     <a:lstStyle/>
                     <a:p>
                       <a:r>
-                        <a:rPr sz="1600"/>
+                        <a:rPr sz="1400"/>
                         <a:t>Bouwen</a:t>
                       </a:r>
                     </a:p>
@@ -3859,7 +3859,7 @@
                     <a:lstStyle/>
                     <a:p>
                       <a:r>
-                        <a:rPr sz="1600"/>
+                        <a:rPr sz="1400"/>
                         <a:t>Service Studio</a:t>
                       </a:r>
                     </a:p>
@@ -3872,7 +3872,7 @@
                     <a:lstStyle/>
                     <a:p>
                       <a:r>
-                        <a:rPr sz="1600"/>
+                        <a:rPr sz="1400"/>
                         <a:t>ODC Studio</a:t>
                       </a:r>
                     </a:p>
@@ -3880,14 +3880,14 @@
                   <a:tcPr/>
                 </a:tc>
               </a:tr>
-              <a:tr h="548640">
+              <a:tr h="457200">
                 <a:tc>
                   <a:txBody>
                     <a:bodyPr/>
                     <a:lstStyle/>
                     <a:p>
                       <a:r>
-                        <a:rPr sz="1600"/>
+                        <a:rPr sz="1400"/>
                         <a:t>Draait op</a:t>
                       </a:r>
                     </a:p>
@@ -3900,7 +3900,7 @@
                     <a:lstStyle/>
                     <a:p>
                       <a:r>
-                        <a:rPr sz="1600"/>
+                        <a:rPr sz="1400"/>
                         <a:t>Environments (Meridiaan-beheerd)</a:t>
                       </a:r>
                     </a:p>
@@ -3913,7 +3913,7 @@
                     <a:lstStyle/>
                     <a:p>
                       <a:r>
-                        <a:rPr sz="1600"/>
+                        <a:rPr sz="1400"/>
                         <a:t>Cloud-workspace (OutSystems-beheerd)</a:t>
                       </a:r>
                     </a:p>
@@ -3921,14 +3921,14 @@
                   <a:tcPr/>
                 </a:tc>
               </a:tr>
-              <a:tr h="548640">
+              <a:tr h="457200">
                 <a:tc>
                   <a:txBody>
                     <a:bodyPr/>
                     <a:lstStyle/>
                     <a:p>
                       <a:r>
-                        <a:rPr sz="1600"/>
+                        <a:rPr sz="1400"/>
                         <a:t>Beheer/promotie</a:t>
                       </a:r>
                     </a:p>
@@ -3941,7 +3941,7 @@
                     <a:lstStyle/>
                     <a:p>
                       <a:r>
-                        <a:rPr sz="1600"/>
+                        <a:rPr sz="1400"/>
                         <a:t>LifeTime</a:t>
                       </a:r>
                     </a:p>
@@ -3954,7 +3954,7 @@
                     <a:lstStyle/>
                     <a:p>
                       <a:r>
-                        <a:rPr sz="1600"/>
+                        <a:rPr sz="1400"/>
                         <a:t>ODC Portal</a:t>
                       </a:r>
                     </a:p>
@@ -3962,14 +3962,14 @@
                   <a:tcPr/>
                 </a:tc>
               </a:tr>
-              <a:tr h="548640">
+              <a:tr h="457200">
                 <a:tc>
                   <a:txBody>
                     <a:bodyPr/>
                     <a:lstStyle/>
                     <a:p>
                       <a:r>
-                        <a:rPr sz="1600"/>
+                        <a:rPr sz="1400"/>
                         <a:t>Publiceren</a:t>
                       </a:r>
                     </a:p>
@@ -3982,7 +3982,7 @@
                     <a:lstStyle/>
                     <a:p>
                       <a:r>
-                        <a:rPr sz="1600"/>
+                        <a:rPr sz="1400"/>
                         <a:t>Publish + LifeTime-promotie</a:t>
                       </a:r>
                     </a:p>
@@ -3995,7 +3995,7 @@
                     <a:lstStyle/>
                     <a:p>
                       <a:r>
-                        <a:rPr sz="1600"/>
+                        <a:rPr sz="1400"/>
                         <a:t>1-Click Publish</a:t>
                       </a:r>
                     </a:p>
@@ -4007,6 +4007,30 @@
           </a:graphicData>
         </a:graphic>
       </p:graphicFrame>
+      <p:pic>
+        <p:nvPicPr>
+          <p:cNvPr id="4" name="Picture 3" descr="figuur-2-1.png"/>
+          <p:cNvPicPr>
+            <a:picLocks noChangeAspect="1"/>
+          </p:cNvPicPr>
+          <p:nvPr/>
+        </p:nvPicPr>
+        <p:blipFill>
+          <a:blip r:embed="rId2"/>
+          <a:stretch>
+            <a:fillRect/>
+          </a:stretch>
+        </p:blipFill>
+        <p:spPr>
+          <a:xfrm>
+            <a:off x="3147060" y="3657600"/>
+            <a:ext cx="5867399" cy="3017520"/>
+          </a:xfrm>
+          <a:prstGeom prst="rect">
+            <a:avLst/>
+          </a:prstGeom>
+        </p:spPr>
+      </p:pic>
     </p:spTree>
   </p:cSld>
   <p:clrMapOvr>
@@ -4102,8 +4126,8 @@
         </p:nvSpPr>
         <p:spPr>
           <a:xfrm>
-            <a:off x="640080" y="548640"/>
-            <a:ext cx="10881360" cy="914400"/>
+            <a:off x="640080" y="457200"/>
+            <a:ext cx="10881360" cy="822960"/>
           </a:xfrm>
           <a:prstGeom prst="rect">
             <a:avLst/>
@@ -4137,8 +4161,8 @@
         </p:nvSpPr>
         <p:spPr>
           <a:xfrm>
-            <a:off x="822960" y="1737360"/>
-            <a:ext cx="10515600" cy="4114800"/>
+            <a:off x="640080" y="1463040"/>
+            <a:ext cx="5029200" cy="4937760"/>
           </a:xfrm>
           <a:prstGeom prst="rect">
             <a:avLst/>
@@ -4153,7 +4177,7 @@
           <a:p>
             <a:pPr algn="l"/>
             <a:r>
-              <a:rPr sz="2000" b="0">
+              <a:rPr sz="1700" b="0">
                 <a:solidFill>
                   <a:srgbClr val="14213D"/>
                 </a:solidFill>
@@ -4165,7 +4189,7 @@
           <a:p>
             <a:pPr algn="l"/>
             <a:r>
-              <a:rPr sz="2000" b="0">
+              <a:rPr sz="1700" b="0">
                 <a:solidFill>
                   <a:srgbClr val="14213D"/>
                 </a:solidFill>
@@ -4177,7 +4201,7 @@
           <a:p>
             <a:pPr algn="l"/>
             <a:r>
-              <a:rPr sz="2000" b="0">
+              <a:rPr sz="1700" b="0">
                 <a:solidFill>
                   <a:srgbClr val="14213D"/>
                 </a:solidFill>
@@ -4189,7 +4213,7 @@
           <a:p>
             <a:pPr algn="l"/>
             <a:r>
-              <a:rPr sz="2000" b="0">
+              <a:rPr sz="1700" b="0">
                 <a:solidFill>
                   <a:srgbClr val="14213D"/>
                 </a:solidFill>
@@ -4200,41 +4224,30 @@
           </a:p>
         </p:txBody>
       </p:sp>
-      <p:sp>
-        <p:nvSpPr>
-          <p:cNvPr id="4" name="TextBox 3"/>
-          <p:cNvSpPr txBox="1"/>
+      <p:pic>
+        <p:nvPicPr>
+          <p:cNvPr id="4" name="Picture 3" descr="figuur-2-2.png"/>
+          <p:cNvPicPr>
+            <a:picLocks noChangeAspect="1"/>
+          </p:cNvPicPr>
           <p:nvPr/>
-        </p:nvSpPr>
+        </p:nvPicPr>
+        <p:blipFill>
+          <a:blip r:embed="rId2"/>
+          <a:stretch>
+            <a:fillRect/>
+          </a:stretch>
+        </p:blipFill>
         <p:spPr>
           <a:xfrm>
-            <a:off x="822960" y="5943600"/>
-            <a:ext cx="10515600" cy="731520"/>
+            <a:off x="5852160" y="2519825"/>
+            <a:ext cx="5669280" cy="2915629"/>
           </a:xfrm>
           <a:prstGeom prst="rect">
             <a:avLst/>
           </a:prstGeom>
-          <a:noFill/>
         </p:spPr>
-        <p:txBody>
-          <a:bodyPr wrap="square">
-            <a:spAutoFit/>
-          </a:bodyPr>
-          <a:lstStyle/>
-          <a:p>
-            <a:pPr algn="l"/>
-            <a:r>
-              <a:rPr sz="1300" b="0">
-                <a:solidFill>
-                  <a:srgbClr val="999999"/>
-                </a:solidFill>
-                <a:latin typeface="DM Sans"/>
-              </a:rPr>
-              <a:t>[FIGUUR 2-2: Voor/na — kleine wijziging (snel) vs attribuut met veel afhankelijkheden (trager)]</a:t>
-            </a:r>
-          </a:p>
-        </p:txBody>
-      </p:sp>
+      </p:pic>
     </p:spTree>
   </p:cSld>
   <p:clrMapOvr>
@@ -4450,8 +4463,8 @@
         </p:nvSpPr>
         <p:spPr>
           <a:xfrm>
-            <a:off x="640080" y="548640"/>
-            <a:ext cx="10881360" cy="914400"/>
+            <a:off x="640080" y="457200"/>
+            <a:ext cx="10881360" cy="822960"/>
           </a:xfrm>
           <a:prstGeom prst="rect">
             <a:avLst/>
@@ -4570,8 +4583,8 @@
         </p:nvSpPr>
         <p:spPr>
           <a:xfrm>
-            <a:off x="640080" y="548640"/>
-            <a:ext cx="10881360" cy="914400"/>
+            <a:off x="640080" y="457200"/>
+            <a:ext cx="10881360" cy="822960"/>
           </a:xfrm>
           <a:prstGeom prst="rect">
             <a:avLst/>
